--- a/Dai pixel ai portafogli finanziari.pptx
+++ b/Dai pixel ai portafogli finanziari.pptx
@@ -16,9 +16,9 @@
     <p:sldId id="387" r:id="rId10"/>
     <p:sldId id="411" r:id="rId11"/>
     <p:sldId id="396" r:id="rId12"/>
-    <p:sldId id="414" r:id="rId13"/>
+    <p:sldId id="419" r:id="rId13"/>
     <p:sldId id="402" r:id="rId14"/>
-    <p:sldId id="416" r:id="rId15"/>
+    <p:sldId id="418" r:id="rId15"/>
     <p:sldId id="409" r:id="rId16"/>
   </p:sldIdLst>
   <p:sldSz cx="12192000" cy="6858000"/>
@@ -273,7 +273,7 @@
           <a:p>
             <a:fld id="{485D3783-32D1-41E5-A9ED-04B73564542D}" type="datetimeFigureOut">
               <a:rPr lang="it-IT" smtClean="0"/>
-              <a:t>01/09/2026</a:t>
+              <a:t>02/09/2026</a:t>
             </a:fld>
             <a:endParaRPr lang="it-IT"/>
           </a:p>
@@ -471,7 +471,7 @@
           <a:p>
             <a:fld id="{485D3783-32D1-41E5-A9ED-04B73564542D}" type="datetimeFigureOut">
               <a:rPr lang="it-IT" smtClean="0"/>
-              <a:t>01/09/2026</a:t>
+              <a:t>02/09/2026</a:t>
             </a:fld>
             <a:endParaRPr lang="it-IT"/>
           </a:p>
@@ -679,7 +679,7 @@
           <a:p>
             <a:fld id="{485D3783-32D1-41E5-A9ED-04B73564542D}" type="datetimeFigureOut">
               <a:rPr lang="it-IT" smtClean="0"/>
-              <a:t>01/09/2026</a:t>
+              <a:t>02/09/2026</a:t>
             </a:fld>
             <a:endParaRPr lang="it-IT"/>
           </a:p>
@@ -877,7 +877,7 @@
           <a:p>
             <a:fld id="{485D3783-32D1-41E5-A9ED-04B73564542D}" type="datetimeFigureOut">
               <a:rPr lang="it-IT" smtClean="0"/>
-              <a:t>01/09/2026</a:t>
+              <a:t>02/09/2026</a:t>
             </a:fld>
             <a:endParaRPr lang="it-IT"/>
           </a:p>
@@ -1152,7 +1152,7 @@
           <a:p>
             <a:fld id="{485D3783-32D1-41E5-A9ED-04B73564542D}" type="datetimeFigureOut">
               <a:rPr lang="it-IT" smtClean="0"/>
-              <a:t>01/09/2026</a:t>
+              <a:t>02/09/2026</a:t>
             </a:fld>
             <a:endParaRPr lang="it-IT"/>
           </a:p>
@@ -1417,7 +1417,7 @@
           <a:p>
             <a:fld id="{485D3783-32D1-41E5-A9ED-04B73564542D}" type="datetimeFigureOut">
               <a:rPr lang="it-IT" smtClean="0"/>
-              <a:t>01/09/2026</a:t>
+              <a:t>02/09/2026</a:t>
             </a:fld>
             <a:endParaRPr lang="it-IT"/>
           </a:p>
@@ -1829,7 +1829,7 @@
           <a:p>
             <a:fld id="{485D3783-32D1-41E5-A9ED-04B73564542D}" type="datetimeFigureOut">
               <a:rPr lang="it-IT" smtClean="0"/>
-              <a:t>01/09/2026</a:t>
+              <a:t>02/09/2026</a:t>
             </a:fld>
             <a:endParaRPr lang="it-IT"/>
           </a:p>
@@ -1970,7 +1970,7 @@
           <a:p>
             <a:fld id="{485D3783-32D1-41E5-A9ED-04B73564542D}" type="datetimeFigureOut">
               <a:rPr lang="it-IT" smtClean="0"/>
-              <a:t>01/09/2026</a:t>
+              <a:t>02/09/2026</a:t>
             </a:fld>
             <a:endParaRPr lang="it-IT"/>
           </a:p>
@@ -2083,7 +2083,7 @@
           <a:p>
             <a:fld id="{485D3783-32D1-41E5-A9ED-04B73564542D}" type="datetimeFigureOut">
               <a:rPr lang="it-IT" smtClean="0"/>
-              <a:t>01/09/2026</a:t>
+              <a:t>02/09/2026</a:t>
             </a:fld>
             <a:endParaRPr lang="it-IT"/>
           </a:p>
@@ -2394,7 +2394,7 @@
           <a:p>
             <a:fld id="{485D3783-32D1-41E5-A9ED-04B73564542D}" type="datetimeFigureOut">
               <a:rPr lang="it-IT" smtClean="0"/>
-              <a:t>01/09/2026</a:t>
+              <a:t>02/09/2026</a:t>
             </a:fld>
             <a:endParaRPr lang="it-IT"/>
           </a:p>
@@ -2682,7 +2682,7 @@
           <a:p>
             <a:fld id="{485D3783-32D1-41E5-A9ED-04B73564542D}" type="datetimeFigureOut">
               <a:rPr lang="it-IT" smtClean="0"/>
-              <a:t>01/09/2026</a:t>
+              <a:t>02/09/2026</a:t>
             </a:fld>
             <a:endParaRPr lang="it-IT"/>
           </a:p>
@@ -2926,7 +2926,7 @@
           <a:p>
             <a:fld id="{485D3783-32D1-41E5-A9ED-04B73564542D}" type="datetimeFigureOut">
               <a:rPr lang="it-IT" smtClean="0"/>
-              <a:t>01/09/2026</a:t>
+              <a:t>02/09/2026</a:t>
             </a:fld>
             <a:endParaRPr lang="it-IT"/>
           </a:p>
@@ -9285,7 +9285,7 @@
               </a:lnSpc>
             </a:pPr>
             <a:r>
-              <a:rPr lang="it-IT" sz="1600" b="1" dirty="0">
+              <a:rPr lang="it-IT" b="1" dirty="0">
                 <a:solidFill>
                   <a:srgbClr val="1A2533"/>
                 </a:solidFill>
@@ -10075,7 +10075,7 @@
               </a:lnSpc>
             </a:pPr>
             <a:r>
-              <a:rPr lang="it-IT" sz="1600" b="1" dirty="0">
+              <a:rPr lang="it-IT" b="1" dirty="0">
                 <a:solidFill>
                   <a:srgbClr val="1A2533"/>
                 </a:solidFill>
@@ -10215,8 +10215,8 @@
         </p:nvSpPr>
         <p:spPr>
           <a:xfrm>
-            <a:off x="7302500" y="2819400"/>
-            <a:ext cx="1803400" cy="330200"/>
+            <a:off x="7302499" y="2819400"/>
+            <a:ext cx="1939471" cy="330200"/>
           </a:xfrm>
           <a:prstGeom prst="rect">
             <a:avLst/>
@@ -10233,7 +10233,7 @@
               </a:lnSpc>
             </a:pPr>
             <a:r>
-              <a:rPr lang="it-IT" sz="1600" b="1" dirty="0">
+              <a:rPr lang="it-IT" b="1" dirty="0">
                 <a:solidFill>
                   <a:srgbClr val="1A2533"/>
                 </a:solidFill>
@@ -10327,7 +10327,7 @@
               </a:lnSpc>
             </a:pPr>
             <a:r>
-              <a:rPr lang="it-IT" sz="1600" b="1" dirty="0">
+              <a:rPr lang="it-IT" b="1" dirty="0">
                 <a:solidFill>
                   <a:srgbClr val="1A2533"/>
                 </a:solidFill>
@@ -10392,7 +10392,7 @@
               </a:lnSpc>
             </a:pPr>
             <a:r>
-              <a:rPr lang="it-IT" sz="1600" b="1" dirty="0">
+              <a:rPr lang="it-IT" b="1" dirty="0">
                 <a:solidFill>
                   <a:srgbClr val="1A2533"/>
                 </a:solidFill>
@@ -10457,7 +10457,7 @@
               </a:lnSpc>
             </a:pPr>
             <a:r>
-              <a:rPr lang="it-IT" sz="1600" b="1" dirty="0">
+              <a:rPr lang="it-IT" b="1" dirty="0">
                 <a:solidFill>
                   <a:srgbClr val="1A2533"/>
                 </a:solidFill>
@@ -11256,7 +11256,7 @@
                   <a:srgbClr val="1A2533"/>
                 </a:solidFill>
               </a:rPr>
-              <a:t> dal gomito della curva di MSE vs K</a:t>
+              <a:t> dal gomito delle curve d’errore dei modelli deterministici</a:t>
             </a:r>
           </a:p>
         </p:txBody>
@@ -11346,7 +11346,7 @@
     </p:spTree>
     <p:extLst>
       <p:ext uri="{BB962C8B-B14F-4D97-AF65-F5344CB8AC3E}">
-        <p14:creationId xmlns:p14="http://schemas.microsoft.com/office/powerpoint/2010/main" val="4019117134"/>
+        <p14:creationId xmlns:p14="http://schemas.microsoft.com/office/powerpoint/2010/main" val="1194658582"/>
       </p:ext>
     </p:extLst>
   </p:cSld>
@@ -12196,7 +12196,7 @@
           <a:p>
             <a:pPr marL="0" indent="0">
               <a:spcAft>
-                <a:spcPts val="500"/>
+                <a:spcPts val="400"/>
               </a:spcAft>
               <a:buNone/>
             </a:pPr>
@@ -12212,10 +12212,10 @@
           <a:p>
             <a:pPr marL="228600" indent="-228600">
               <a:lnSpc>
-                <a:spcPts val="2100"/>
+                <a:spcPts val="1900"/>
               </a:lnSpc>
               <a:spcBef>
-                <a:spcPts val="200"/>
+                <a:spcPts val="100"/>
               </a:spcBef>
               <a:buFont typeface="Arial"/>
               <a:buChar char="•"/>
@@ -12232,10 +12232,10 @@
           <a:p>
             <a:pPr marL="228600" indent="-228600">
               <a:lnSpc>
-                <a:spcPts val="2100"/>
+                <a:spcPts val="1900"/>
               </a:lnSpc>
               <a:spcBef>
-                <a:spcPts val="200"/>
+                <a:spcPts val="100"/>
               </a:spcBef>
               <a:buFont typeface="Arial"/>
               <a:buChar char="•"/>
@@ -12252,10 +12252,10 @@
           <a:p>
             <a:pPr marL="228600" indent="-228600">
               <a:lnSpc>
-                <a:spcPts val="2100"/>
+                <a:spcPts val="1900"/>
               </a:lnSpc>
               <a:spcBef>
-                <a:spcPts val="200"/>
+                <a:spcPts val="100"/>
               </a:spcBef>
               <a:buFont typeface="Arial"/>
               <a:buChar char="•"/>
@@ -12272,10 +12272,10 @@
           <a:p>
             <a:pPr marL="228600" indent="-228600">
               <a:lnSpc>
-                <a:spcPts val="2100"/>
+                <a:spcPts val="1900"/>
               </a:lnSpc>
               <a:spcBef>
-                <a:spcPts val="200"/>
+                <a:spcPts val="100"/>
               </a:spcBef>
               <a:buFont typeface="Arial"/>
               <a:buChar char="•"/>
@@ -12286,16 +12286,36 @@
                   <a:srgbClr val="1A2533"/>
                 </a:solidFill>
               </a:rPr>
-              <a:t>altre asset class e panieri internazionali</a:t>
+              <a:t>rimozione del survivorship bias (panel variabile)</a:t>
             </a:r>
           </a:p>
           <a:p>
             <a:pPr marL="228600" indent="-228600">
               <a:lnSpc>
-                <a:spcPts val="2100"/>
+                <a:spcPts val="1900"/>
               </a:lnSpc>
               <a:spcBef>
-                <a:spcPts val="200"/>
+                <a:spcPts val="100"/>
+              </a:spcBef>
+              <a:buFont typeface="Arial"/>
+              <a:buChar char="•"/>
+            </a:pPr>
+            <a:r>
+              <a:rPr lang="it-IT" sz="1800" dirty="0">
+                <a:solidFill>
+                  <a:srgbClr val="1A2533"/>
+                </a:solidFill>
+              </a:rPr>
+              <a:t>altre asset class (valute, materie prime)</a:t>
+            </a:r>
+          </a:p>
+          <a:p>
+            <a:pPr marL="228600" indent="-228600">
+              <a:lnSpc>
+                <a:spcPts val="1900"/>
+              </a:lnSpc>
+              <a:spcBef>
+                <a:spcPts val="100"/>
               </a:spcBef>
               <a:buFont typeface="Arial"/>
               <a:buChar char="•"/>
@@ -12354,7 +12374,7 @@
     </p:spTree>
     <p:extLst>
       <p:ext uri="{BB962C8B-B14F-4D97-AF65-F5344CB8AC3E}">
-        <p14:creationId xmlns:p14="http://schemas.microsoft.com/office/powerpoint/2010/main" val="1719750494"/>
+        <p14:creationId xmlns:p14="http://schemas.microsoft.com/office/powerpoint/2010/main" val="3607931313"/>
       </p:ext>
     </p:extLst>
   </p:cSld>
@@ -15532,7 +15552,7 @@
 
 <file path=ppt/webextensions/taskpanes.xml><?xml version="1.0" encoding="utf-8"?>
 <wetp:taskpanes xmlns:wetp="http://schemas.microsoft.com/office/webextensions/taskpanes/2010/11">
-  <wetp:taskpane dockstate="right" visibility="0" width="452" row="0">
+  <wetp:taskpane dockstate="right" visibility="0" width="622" row="0">
     <wetp:webextensionref xmlns:r="http://schemas.openxmlformats.org/officeDocument/2006/relationships" r:id="rId1"/>
   </wetp:taskpane>
 </wetp:taskpanes>

--- a/Dai pixel ai portafogli finanziari.pptx
+++ b/Dai pixel ai portafogli finanziari.pptx
@@ -273,7 +273,7 @@
           <a:p>
             <a:fld id="{485D3783-32D1-41E5-A9ED-04B73564542D}" type="datetimeFigureOut">
               <a:rPr lang="it-IT" smtClean="0"/>
-              <a:t>02/09/2026</a:t>
+              <a:t>03/09/2026</a:t>
             </a:fld>
             <a:endParaRPr lang="it-IT"/>
           </a:p>
@@ -471,7 +471,7 @@
           <a:p>
             <a:fld id="{485D3783-32D1-41E5-A9ED-04B73564542D}" type="datetimeFigureOut">
               <a:rPr lang="it-IT" smtClean="0"/>
-              <a:t>02/09/2026</a:t>
+              <a:t>03/09/2026</a:t>
             </a:fld>
             <a:endParaRPr lang="it-IT"/>
           </a:p>
@@ -679,7 +679,7 @@
           <a:p>
             <a:fld id="{485D3783-32D1-41E5-A9ED-04B73564542D}" type="datetimeFigureOut">
               <a:rPr lang="it-IT" smtClean="0"/>
-              <a:t>02/09/2026</a:t>
+              <a:t>03/09/2026</a:t>
             </a:fld>
             <a:endParaRPr lang="it-IT"/>
           </a:p>
@@ -877,7 +877,7 @@
           <a:p>
             <a:fld id="{485D3783-32D1-41E5-A9ED-04B73564542D}" type="datetimeFigureOut">
               <a:rPr lang="it-IT" smtClean="0"/>
-              <a:t>02/09/2026</a:t>
+              <a:t>03/09/2026</a:t>
             </a:fld>
             <a:endParaRPr lang="it-IT"/>
           </a:p>
@@ -1152,7 +1152,7 @@
           <a:p>
             <a:fld id="{485D3783-32D1-41E5-A9ED-04B73564542D}" type="datetimeFigureOut">
               <a:rPr lang="it-IT" smtClean="0"/>
-              <a:t>02/09/2026</a:t>
+              <a:t>03/09/2026</a:t>
             </a:fld>
             <a:endParaRPr lang="it-IT"/>
           </a:p>
@@ -1417,7 +1417,7 @@
           <a:p>
             <a:fld id="{485D3783-32D1-41E5-A9ED-04B73564542D}" type="datetimeFigureOut">
               <a:rPr lang="it-IT" smtClean="0"/>
-              <a:t>02/09/2026</a:t>
+              <a:t>03/09/2026</a:t>
             </a:fld>
             <a:endParaRPr lang="it-IT"/>
           </a:p>
@@ -1829,7 +1829,7 @@
           <a:p>
             <a:fld id="{485D3783-32D1-41E5-A9ED-04B73564542D}" type="datetimeFigureOut">
               <a:rPr lang="it-IT" smtClean="0"/>
-              <a:t>02/09/2026</a:t>
+              <a:t>03/09/2026</a:t>
             </a:fld>
             <a:endParaRPr lang="it-IT"/>
           </a:p>
@@ -1970,7 +1970,7 @@
           <a:p>
             <a:fld id="{485D3783-32D1-41E5-A9ED-04B73564542D}" type="datetimeFigureOut">
               <a:rPr lang="it-IT" smtClean="0"/>
-              <a:t>02/09/2026</a:t>
+              <a:t>03/09/2026</a:t>
             </a:fld>
             <a:endParaRPr lang="it-IT"/>
           </a:p>
@@ -2083,7 +2083,7 @@
           <a:p>
             <a:fld id="{485D3783-32D1-41E5-A9ED-04B73564542D}" type="datetimeFigureOut">
               <a:rPr lang="it-IT" smtClean="0"/>
-              <a:t>02/09/2026</a:t>
+              <a:t>03/09/2026</a:t>
             </a:fld>
             <a:endParaRPr lang="it-IT"/>
           </a:p>
@@ -2394,7 +2394,7 @@
           <a:p>
             <a:fld id="{485D3783-32D1-41E5-A9ED-04B73564542D}" type="datetimeFigureOut">
               <a:rPr lang="it-IT" smtClean="0"/>
-              <a:t>02/09/2026</a:t>
+              <a:t>03/09/2026</a:t>
             </a:fld>
             <a:endParaRPr lang="it-IT"/>
           </a:p>
@@ -2682,7 +2682,7 @@
           <a:p>
             <a:fld id="{485D3783-32D1-41E5-A9ED-04B73564542D}" type="datetimeFigureOut">
               <a:rPr lang="it-IT" smtClean="0"/>
-              <a:t>02/09/2026</a:t>
+              <a:t>03/09/2026</a:t>
             </a:fld>
             <a:endParaRPr lang="it-IT"/>
           </a:p>
@@ -2926,7 +2926,7 @@
           <a:p>
             <a:fld id="{485D3783-32D1-41E5-A9ED-04B73564542D}" type="datetimeFigureOut">
               <a:rPr lang="it-IT" smtClean="0"/>
-              <a:t>02/09/2026</a:t>
+              <a:t>03/09/2026</a:t>
             </a:fld>
             <a:endParaRPr lang="it-IT"/>
           </a:p>
@@ -12486,7 +12486,7 @@
                   <a:srgbClr val="1A2533"/>
                 </a:solidFill>
               </a:rPr>
-              <a:t>e ai dott. Sergio Caprioli ed Emanuele Cagliero di Intesa Sanpaolo</a:t>
+              <a:t>e ai dott. Sergio Caprioli, Emanuele Cagliero e Riccardo Crupi di Intesa Sanpaolo</a:t>
             </a:r>
           </a:p>
           <a:p>
